--- a/paper/figures/gen/fig1_idea.pptx
+++ b/paper/figures/gen/fig1_idea.pptx
@@ -3179,7 +3179,7 @@
                 </a:solidFill>
                 <a:latin typeface="Helvetica"/>
               </a:rPr>
-              <a:t>   Agreement ≠ terminality</a:t>
+              <a:t>   Agreement ≠ termination</a:t>
             </a:r>
           </a:p>
         </p:txBody>
@@ -6498,7 +6498,7 @@
                 </a:solidFill>
                 <a:latin typeface="Helvetica"/>
               </a:rPr>
-              <a:t>harm : rescue ≈ 45 : 1</a:t>
+              <a:t>harm : rescue  45:1 → 2:1</a:t>
             </a:r>
           </a:p>
         </p:txBody>
@@ -8714,7 +8714,7 @@
                 </a:solidFill>
                 <a:latin typeface="Helvetica"/>
               </a:rPr>
-              <a:t>   The failure is the signal</a:t>
+              <a:t>   Early exit is not the problem</a:t>
             </a:r>
           </a:p>
         </p:txBody>
@@ -8753,7 +8753,7 @@
                 </a:solidFill>
                 <a:latin typeface="Helvetica"/>
               </a:rPr>
-              <a:t>identical pipeline, gates and accounting</a:t>
+              <a:t>same sweep, gates and accounting</a:t>
             </a:r>
           </a:p>
         </p:txBody>
@@ -9591,7 +9591,7 @@
                 </a:solidFill>
                 <a:latin typeface="Helvetica"/>
               </a:rPr>
-              <a:t>Early exit is possible — the consensus </a:t>
+              <a:t>Early exit is possible — </a:t>
             </a:r>
             <a:r>
               <a:rPr sz="850" b="1" i="1">
@@ -9600,7 +9600,7 @@
                 </a:solidFill>
                 <a:latin typeface="Helvetica"/>
               </a:rPr>
-              <a:t>signal</a:t>
+              <a:t>self-consensus</a:t>
             </a:r>
             <a:r>
               <a:rPr sz="850" b="0" i="0">
